--- a/data-eng/decks/w6d5s1.pptx
+++ b/data-eng/decks/w6d5s1.pptx
@@ -3100,7 +3100,7 @@
       <p:grpSpPr/>
       <p:sp>
         <p:nvSpPr>
-          <p:cNvPr id="2" name="Oval 1"/>
+          <p:cNvPr id="2" name="deckgen:decor"/>
           <p:cNvSpPr/>
           <p:nvPr/>
         </p:nvSpPr>
@@ -3130,7 +3130,7 @@
       </p:sp>
       <p:sp>
         <p:nvSpPr>
-          <p:cNvPr id="3" name="Oval 2"/>
+          <p:cNvPr id="3" name="deckgen:decor"/>
           <p:cNvSpPr/>
           <p:nvPr/>
         </p:nvSpPr>
@@ -3160,7 +3160,7 @@
       </p:sp>
       <p:sp>
         <p:nvSpPr>
-          <p:cNvPr id="4" name="Oval 3"/>
+          <p:cNvPr id="4" name="deckgen:decor"/>
           <p:cNvSpPr/>
           <p:nvPr/>
         </p:nvSpPr>
@@ -3190,7 +3190,7 @@
       </p:sp>
       <p:sp>
         <p:nvSpPr>
-          <p:cNvPr id="5" name="Rectangle 4"/>
+          <p:cNvPr id="5" name="deckgen:decor"/>
           <p:cNvSpPr/>
           <p:nvPr/>
         </p:nvSpPr>
@@ -3220,7 +3220,7 @@
       </p:sp>
       <p:sp>
         <p:nvSpPr>
-          <p:cNvPr id="6" name="Oval 5"/>
+          <p:cNvPr id="6" name="deckgen:decor"/>
           <p:cNvSpPr/>
           <p:nvPr/>
         </p:nvSpPr>
@@ -3250,7 +3250,7 @@
       </p:sp>
       <p:sp>
         <p:nvSpPr>
-          <p:cNvPr id="7" name="Oval 6"/>
+          <p:cNvPr id="7" name="deckgen:decor"/>
           <p:cNvSpPr/>
           <p:nvPr/>
         </p:nvSpPr>
@@ -3280,7 +3280,7 @@
       </p:sp>
       <p:sp>
         <p:nvSpPr>
-          <p:cNvPr id="8" name="Oval 7"/>
+          <p:cNvPr id="8" name="deckgen:decor"/>
           <p:cNvSpPr/>
           <p:nvPr/>
         </p:nvSpPr>
@@ -3310,7 +3310,7 @@
       </p:sp>
       <p:sp>
         <p:nvSpPr>
-          <p:cNvPr id="9" name="Oval 8"/>
+          <p:cNvPr id="9" name="deckgen:decor"/>
           <p:cNvSpPr/>
           <p:nvPr/>
         </p:nvSpPr>
@@ -3340,7 +3340,7 @@
       </p:sp>
       <p:sp>
         <p:nvSpPr>
-          <p:cNvPr id="10" name="Rectangle 9"/>
+          <p:cNvPr id="10" name="deckgen:decor"/>
           <p:cNvSpPr/>
           <p:nvPr/>
         </p:nvSpPr>
@@ -3600,7 +3600,7 @@
       <p:grpSpPr/>
       <p:sp>
         <p:nvSpPr>
-          <p:cNvPr id="2" name="Oval 1"/>
+          <p:cNvPr id="2" name="deckgen:decor"/>
           <p:cNvSpPr/>
           <p:nvPr/>
         </p:nvSpPr>
@@ -3630,7 +3630,7 @@
       </p:sp>
       <p:sp>
         <p:nvSpPr>
-          <p:cNvPr id="3" name="Oval 2"/>
+          <p:cNvPr id="3" name="deckgen:decor"/>
           <p:cNvSpPr/>
           <p:nvPr/>
         </p:nvSpPr>
@@ -3660,7 +3660,7 @@
       </p:sp>
       <p:sp>
         <p:nvSpPr>
-          <p:cNvPr id="4" name="Oval 3"/>
+          <p:cNvPr id="4" name="deckgen:decor"/>
           <p:cNvSpPr/>
           <p:nvPr/>
         </p:nvSpPr>
@@ -4808,7 +4808,7 @@
       <p:grpSpPr/>
       <p:sp>
         <p:nvSpPr>
-          <p:cNvPr id="2" name="Oval 1"/>
+          <p:cNvPr id="2" name="deckgen:decor"/>
           <p:cNvSpPr/>
           <p:nvPr/>
         </p:nvSpPr>
@@ -4838,7 +4838,7 @@
       </p:sp>
       <p:sp>
         <p:nvSpPr>
-          <p:cNvPr id="3" name="Oval 2"/>
+          <p:cNvPr id="3" name="deckgen:decor"/>
           <p:cNvSpPr/>
           <p:nvPr/>
         </p:nvSpPr>
@@ -5061,7 +5061,7 @@
         </p:nvSpPr>
         <p:spPr>
           <a:xfrm>
-            <a:off x="1428750" y="5486400"/>
+            <a:off x="1428750" y="5476875"/>
             <a:ext cx="419100" cy="381000"/>
           </a:xfrm>
           <a:prstGeom prst="rect">
@@ -5102,7 +5102,7 @@
         </p:nvSpPr>
         <p:spPr>
           <a:xfrm>
-            <a:off x="1905000" y="5486400"/>
+            <a:off x="1905000" y="5476875"/>
             <a:ext cx="6724650" cy="381000"/>
           </a:xfrm>
           <a:prstGeom prst="rect">
@@ -5177,7 +5177,7 @@
         </p:nvSpPr>
         <p:spPr>
           <a:xfrm>
-            <a:off x="9658350" y="5486400"/>
+            <a:off x="9658350" y="5476875"/>
             <a:ext cx="419100" cy="381000"/>
           </a:xfrm>
           <a:prstGeom prst="rect">
@@ -5218,7 +5218,7 @@
         </p:nvSpPr>
         <p:spPr>
           <a:xfrm>
-            <a:off x="10134600" y="5486400"/>
+            <a:off x="10134600" y="5476875"/>
             <a:ext cx="6724650" cy="381000"/>
           </a:xfrm>
           <a:prstGeom prst="rect">
@@ -5293,7 +5293,7 @@
         </p:nvSpPr>
         <p:spPr>
           <a:xfrm>
-            <a:off x="1428750" y="6515100"/>
+            <a:off x="1428750" y="6505575"/>
             <a:ext cx="419100" cy="381000"/>
           </a:xfrm>
           <a:prstGeom prst="rect">
@@ -5334,7 +5334,7 @@
         </p:nvSpPr>
         <p:spPr>
           <a:xfrm>
-            <a:off x="1905000" y="6515100"/>
+            <a:off x="1905000" y="6505575"/>
             <a:ext cx="6724650" cy="381000"/>
           </a:xfrm>
           <a:prstGeom prst="rect">
@@ -5409,7 +5409,7 @@
         </p:nvSpPr>
         <p:spPr>
           <a:xfrm>
-            <a:off x="9658350" y="6515100"/>
+            <a:off x="9658350" y="6505575"/>
             <a:ext cx="419100" cy="381000"/>
           </a:xfrm>
           <a:prstGeom prst="rect">
@@ -5450,7 +5450,7 @@
         </p:nvSpPr>
         <p:spPr>
           <a:xfrm>
-            <a:off x="10134600" y="6515100"/>
+            <a:off x="10134600" y="6505575"/>
             <a:ext cx="6724650" cy="381000"/>
           </a:xfrm>
           <a:prstGeom prst="rect">
@@ -5615,7 +5615,7 @@
       <p:grpSpPr/>
       <p:sp>
         <p:nvSpPr>
-          <p:cNvPr id="2" name="Oval 1"/>
+          <p:cNvPr id="2" name="deckgen:decor"/>
           <p:cNvSpPr/>
           <p:nvPr/>
         </p:nvSpPr>
@@ -5645,7 +5645,7 @@
       </p:sp>
       <p:sp>
         <p:nvSpPr>
-          <p:cNvPr id="3" name="Oval 2"/>
+          <p:cNvPr id="3" name="deckgen:decor"/>
           <p:cNvSpPr/>
           <p:nvPr/>
         </p:nvSpPr>
@@ -5675,7 +5675,7 @@
       </p:sp>
       <p:sp>
         <p:nvSpPr>
-          <p:cNvPr id="4" name="Oval 3"/>
+          <p:cNvPr id="4" name="deckgen:decor"/>
           <p:cNvSpPr/>
           <p:nvPr/>
         </p:nvSpPr>
@@ -6606,7 +6606,7 @@
       <p:grpSpPr/>
       <p:sp>
         <p:nvSpPr>
-          <p:cNvPr id="2" name="Oval 1"/>
+          <p:cNvPr id="2" name="deckgen:decor"/>
           <p:cNvSpPr/>
           <p:nvPr/>
         </p:nvSpPr>
@@ -6636,7 +6636,7 @@
       </p:sp>
       <p:sp>
         <p:nvSpPr>
-          <p:cNvPr id="3" name="Oval 2"/>
+          <p:cNvPr id="3" name="deckgen:decor"/>
           <p:cNvSpPr/>
           <p:nvPr/>
         </p:nvSpPr>
@@ -6666,7 +6666,7 @@
       </p:sp>
       <p:sp>
         <p:nvSpPr>
-          <p:cNvPr id="4" name="Oval 3"/>
+          <p:cNvPr id="4" name="deckgen:decor"/>
           <p:cNvSpPr/>
           <p:nvPr/>
         </p:nvSpPr>
@@ -7994,7 +7994,7 @@
       <p:grpSpPr/>
       <p:sp>
         <p:nvSpPr>
-          <p:cNvPr id="2" name="Oval 1"/>
+          <p:cNvPr id="2" name="deckgen:decor"/>
           <p:cNvSpPr/>
           <p:nvPr/>
         </p:nvSpPr>
@@ -8024,7 +8024,7 @@
       </p:sp>
       <p:sp>
         <p:nvSpPr>
-          <p:cNvPr id="3" name="Oval 2"/>
+          <p:cNvPr id="3" name="deckgen:decor"/>
           <p:cNvSpPr/>
           <p:nvPr/>
         </p:nvSpPr>
@@ -8054,7 +8054,7 @@
       </p:sp>
       <p:sp>
         <p:nvSpPr>
-          <p:cNvPr id="4" name="Oval 3"/>
+          <p:cNvPr id="4" name="deckgen:decor"/>
           <p:cNvSpPr/>
           <p:nvPr/>
         </p:nvSpPr>
@@ -9480,7 +9480,7 @@
       <p:grpSpPr/>
       <p:sp>
         <p:nvSpPr>
-          <p:cNvPr id="2" name="Oval 1"/>
+          <p:cNvPr id="2" name="deckgen:decor"/>
           <p:cNvSpPr/>
           <p:nvPr/>
         </p:nvSpPr>
@@ -9510,7 +9510,7 @@
       </p:sp>
       <p:sp>
         <p:nvSpPr>
-          <p:cNvPr id="3" name="Oval 2"/>
+          <p:cNvPr id="3" name="deckgen:decor"/>
           <p:cNvSpPr/>
           <p:nvPr/>
         </p:nvSpPr>
@@ -9540,7 +9540,7 @@
       </p:sp>
       <p:sp>
         <p:nvSpPr>
-          <p:cNvPr id="4" name="Oval 3"/>
+          <p:cNvPr id="4" name="deckgen:decor"/>
           <p:cNvSpPr/>
           <p:nvPr/>
         </p:nvSpPr>
@@ -10507,7 +10507,7 @@
       <p:grpSpPr/>
       <p:sp>
         <p:nvSpPr>
-          <p:cNvPr id="2" name="Oval 1"/>
+          <p:cNvPr id="2" name="deckgen:decor"/>
           <p:cNvSpPr/>
           <p:nvPr/>
         </p:nvSpPr>
@@ -10537,7 +10537,7 @@
       </p:sp>
       <p:sp>
         <p:nvSpPr>
-          <p:cNvPr id="3" name="Oval 2"/>
+          <p:cNvPr id="3" name="deckgen:decor"/>
           <p:cNvSpPr/>
           <p:nvPr/>
         </p:nvSpPr>
@@ -10567,7 +10567,7 @@
       </p:sp>
       <p:sp>
         <p:nvSpPr>
-          <p:cNvPr id="4" name="Oval 3"/>
+          <p:cNvPr id="4" name="deckgen:decor"/>
           <p:cNvSpPr/>
           <p:nvPr/>
         </p:nvSpPr>
@@ -11701,7 +11701,7 @@
       <p:grpSpPr/>
       <p:sp>
         <p:nvSpPr>
-          <p:cNvPr id="2" name="Oval 1"/>
+          <p:cNvPr id="2" name="deckgen:decor"/>
           <p:cNvSpPr/>
           <p:nvPr/>
         </p:nvSpPr>
@@ -11731,7 +11731,7 @@
       </p:sp>
       <p:sp>
         <p:nvSpPr>
-          <p:cNvPr id="3" name="Oval 2"/>
+          <p:cNvPr id="3" name="deckgen:decor"/>
           <p:cNvSpPr/>
           <p:nvPr/>
         </p:nvSpPr>
@@ -11761,7 +11761,7 @@
       </p:sp>
       <p:sp>
         <p:nvSpPr>
-          <p:cNvPr id="4" name="Oval 3"/>
+          <p:cNvPr id="4" name="deckgen:decor"/>
           <p:cNvSpPr/>
           <p:nvPr/>
         </p:nvSpPr>
@@ -12762,7 +12762,7 @@
       <p:grpSpPr/>
       <p:sp>
         <p:nvSpPr>
-          <p:cNvPr id="2" name="Oval 1"/>
+          <p:cNvPr id="2" name="deckgen:decor"/>
           <p:cNvSpPr/>
           <p:nvPr/>
         </p:nvSpPr>
@@ -12792,7 +12792,7 @@
       </p:sp>
       <p:sp>
         <p:nvSpPr>
-          <p:cNvPr id="3" name="Oval 2"/>
+          <p:cNvPr id="3" name="deckgen:decor"/>
           <p:cNvSpPr/>
           <p:nvPr/>
         </p:nvSpPr>
@@ -12822,7 +12822,7 @@
       </p:sp>
       <p:sp>
         <p:nvSpPr>
-          <p:cNvPr id="4" name="Oval 3"/>
+          <p:cNvPr id="4" name="deckgen:decor"/>
           <p:cNvSpPr/>
           <p:nvPr/>
         </p:nvSpPr>
@@ -13817,7 +13817,7 @@
       <p:grpSpPr/>
       <p:sp>
         <p:nvSpPr>
-          <p:cNvPr id="2" name="Oval 1"/>
+          <p:cNvPr id="2" name="deckgen:decor"/>
           <p:cNvSpPr/>
           <p:nvPr/>
         </p:nvSpPr>
@@ -13847,7 +13847,7 @@
       </p:sp>
       <p:sp>
         <p:nvSpPr>
-          <p:cNvPr id="3" name="Oval 2"/>
+          <p:cNvPr id="3" name="deckgen:decor"/>
           <p:cNvSpPr/>
           <p:nvPr/>
         </p:nvSpPr>
@@ -13877,7 +13877,7 @@
       </p:sp>
       <p:sp>
         <p:nvSpPr>
-          <p:cNvPr id="4" name="Oval 3"/>
+          <p:cNvPr id="4" name="deckgen:decor"/>
           <p:cNvSpPr/>
           <p:nvPr/>
         </p:nvSpPr>
